--- a/kvcache/unified_kv_memory/进度汇报/2026-10-15_汇报_v2/KVC价值_技术方向_后续计划_三页进展稿_V12_20261015.pptx
+++ b/kvcache/unified_kv_memory/进度汇报/2026-10-15_汇报_v2/KVC价值_技术方向_后续计划_三页进展稿_V12_20261015.pptx
@@ -745,43 +745,75 @@
           <a:lstStyle/>
           <a:p>
             <a:r>
-              <a:t>【汇报讲稿与技术背景（第 3 页：下一步工作安排）】</a:t>
-            </a:r>
-          </a:p>
-          <a:p>
-            <a:r>
-              <a:t>最后向各位领导汇报我们后续的工作规划与推进节奏：</a:t>
-            </a:r>
-          </a:p>
-          <a:p>
-            <a:r>
-              <a:t>本次汇报的后续工作安排坚持研发客观演进节奏，不设置死板行政化排期，聚焦于物理开销摸底与软硬件协同课题沉淀：</a:t>
-            </a:r>
-          </a:p>
-          <a:p>
-            <a:r>
-              <a:t>1. 控制面：补齐微秒级检索、注册、提交与排队耗时分解，摸清在低载与高并发快加载下的行为；</a:t>
-            </a:r>
-          </a:p>
-          <a:p>
-            <a:r>
-              <a:t>2. 数据面：严格比较块粒度、连续性、设备直达与按层流水，观察加载等待和逐层召回的停顿掩盖效果；</a:t>
-            </a:r>
-          </a:p>
-          <a:p>
-            <a:r>
-              <a:t>3. 组合与混压：在代表工况下组合有效机制，测试前台在线推理受后台满载搬运的干扰程度；</a:t>
-            </a:r>
-          </a:p>
-          <a:p>
-            <a:r>
-              <a:t>4. 软硬协同研究：依托第一页提炼的物理化递进链条，把瓶颈对应到布局转换、稳定描述符、拓扑与队列硬件能力，提炼出可落地的共性芯片课题。</a:t>
+              <a:t>【汇报讲稿与技术背景（第 3 页：工作规划与收官展望）】</a:t>
+            </a:r>
+          </a:p>
+          <a:p>
+            <a:r>
+              <a:t>各位领导、评审专家，在前面几页中，我们汇报了 KVC 的体系结构物理化价值与盈亏平衡实测，随后各位同事详细汇报了控制面微秒快路径与数据面连续聚合的实际优化数据。在此坚实的技术基础上，最后一页我向领导重点汇报后续的技术演进路线与确定性交付资产：</a:t>
             </a:r>
           </a:p>
           <a:p/>
           <a:p>
             <a:r>
-              <a:t>节奏上采用三周推进闭环：第 1 周统一测清基线；第 2 周单项机制穿透；第 3 周组合混压并汇总成果与研究课题。</a:t>
+              <a:t>【一、技术演进三阶段路线】：</a:t>
+            </a:r>
+          </a:p>
+          <a:p>
+            <a:r>
+              <a:t>我们坚持技术研发客观演进规律，确立了清晰的三阶演进阶梯：</a:t>
+            </a:r>
+          </a:p>
+          <a:p>
+            <a:r>
+              <a:t>1. 阶段一（近期 1~3 周 · 原型闭环）：推进全链路机制组合与前后台真实混压，以严格门禁检验成果（TTFT 缩短 ≥20%、QPS 提升 ≥10%、TPOT 干扰率 &lt;3%），彻底摸清收益边界与资源代价；</a:t>
+            </a:r>
+          </a:p>
+          <a:p>
+            <a:r>
+              <a:t>2. 阶段二（中期 1~2 个月 · 生产就绪）：无缝嵌入主流开源推理引擎（vLLM / SGLang），打通张量并行多卡状态同步与多级存储自动流转，实现高可用生产就绪；</a:t>
+            </a:r>
+          </a:p>
+          <a:p>
+            <a:r>
+              <a:t>3. 阶段三（远期 · 体系突破）：跳出单一软件优化视角，将实测验证有效的物理机制沉淀为下一代国产 AI 芯片的硬件能力需求书，反哺芯片架构设计，构筑软硬协同核心壁垒。</a:t>
+            </a:r>
+          </a:p>
+          <a:p/>
+          <a:p>
+            <a:r>
+              <a:t>【二、沉淀四大硬核交付资产】：</a:t>
+            </a:r>
+          </a:p>
+          <a:p>
+            <a:r>
+              <a:t>我们不仅要完成技术验证，更要向部门沉淀四项确定性高价值资产：</a:t>
+            </a:r>
+          </a:p>
+          <a:p>
+            <a:r>
+              <a:t>① 代码资产：高可用、高质量的统一调度底座工程主干，单测覆盖率 ≥85%；</a:t>
+            </a:r>
+          </a:p>
+          <a:p>
+            <a:r>
+              <a:t>② 数据资产：全工况透明实测证据对账集，为各业务线提供透明的 ROI 决策标尺；</a:t>
+            </a:r>
+          </a:p>
+          <a:p>
+            <a:r>
+              <a:t>③ 规范资产：面向下代芯片的硬件需求输入书，推动芯片原生支持连续块与 DMA 直达；</a:t>
+            </a:r>
+          </a:p>
+          <a:p>
+            <a:r>
+              <a:t>④ 落地资产：生产级部署与参数调优指南，保障线上服务平稳达标。</a:t>
+            </a:r>
+          </a:p>
+          <a:p/>
+          <a:p>
+            <a:r>
+              <a:t>我们的实施准则是：坚持数据驱动与真实混压门禁验收，以扎实的原型实测支撑系统落地，以深度的物理瓶颈洞察反哺下一代国产芯片软硬协同演进！</a:t>
             </a:r>
           </a:p>
         </p:txBody>
@@ -7930,7 +7962,7 @@
               </a:defRPr>
             </a:pPr>
             <a:r>
-              <a:t>下一步工作安排</a:t>
+              <a:t>工作规划与收官展望：从原型验证走向系统落地与软硬协同</a:t>
             </a:r>
           </a:p>
         </p:txBody>
@@ -7966,7 +7998,7 @@
               </a:defRPr>
             </a:pPr>
             <a:r>
-              <a:t>KVC 工作规划 · 原型实测与软硬协同</a:t>
+              <a:t>KVC 演进规划 · 阶段阶梯与交付闭环</a:t>
             </a:r>
           </a:p>
         </p:txBody>
@@ -8092,587 +8124,21 @@
               </a:defRPr>
             </a:pPr>
             <a:r>
-              <a:t>持续推进控制面与数据面原型实测验证，系统归纳物理瓶颈并提炼为软硬件协同研究课题。</a:t>
-            </a:r>
-          </a:p>
-        </p:txBody>
-      </p:sp>
-      <p:graphicFrame>
-        <p:nvGraphicFramePr>
-          <p:cNvPr id="8" name="Table 7"/>
-          <p:cNvGraphicFramePr>
-            <a:graphicFrameLocks noGrp="1"/>
-          </p:cNvGraphicFramePr>
-          <p:nvPr/>
-        </p:nvGraphicFramePr>
-        <p:xfrm>
-          <a:off x="457200" y="1234440"/>
-          <a:ext cx="11277295" cy="3017520"/>
-        </p:xfrm>
-        <a:graphic>
-          <a:graphicData uri="http://schemas.openxmlformats.org/drawingml/2006/table">
-            <a:tbl>
-              <a:tblPr firstRow="1" bandRow="1">
-                <a:tableStyleId>{5C22544A-7EE6-4342-B048-85BDC9FD1C3A}</a:tableStyleId>
-              </a:tblPr>
-              <a:tblGrid>
-                <a:gridCol w="1645920"/>
-                <a:gridCol w="3474720"/>
-                <a:gridCol w="2743200"/>
-                <a:gridCol w="3413455"/>
-              </a:tblGrid>
-              <a:tr h="603504">
-                <a:tc>
-                  <a:txBody>
-                    <a:bodyPr/>
-                    <a:lstStyle/>
-                    <a:p>
-                      <a:pPr algn="ctr">
-                        <a:defRPr sz="919" b="1">
-                          <a:solidFill>
-                            <a:srgbClr val="FFFFFF"/>
-                          </a:solidFill>
-                          <a:latin typeface="Microsoft YaHei"/>
-                        </a:defRPr>
-                      </a:pPr>
-                      <a:r>
-                        <a:t>工作方向</a:t>
-                      </a:r>
-                    </a:p>
-                  </a:txBody>
-                  <a:tcPr anchor="ctr">
-                    <a:solidFill>
-                      <a:srgbClr val="1E3A8A"/>
-                    </a:solidFill>
-                  </a:tcPr>
-                </a:tc>
-                <a:tc>
-                  <a:txBody>
-                    <a:bodyPr/>
-                    <a:lstStyle/>
-                    <a:p>
-                      <a:pPr algn="ctr">
-                        <a:defRPr sz="919" b="1">
-                          <a:solidFill>
-                            <a:srgbClr val="FFFFFF"/>
-                          </a:solidFill>
-                          <a:latin typeface="Microsoft YaHei"/>
-                        </a:defRPr>
-                      </a:pPr>
-                      <a:r>
-                        <a:t>近期工作重点</a:t>
-                      </a:r>
-                    </a:p>
-                  </a:txBody>
-                  <a:tcPr anchor="ctr">
-                    <a:solidFill>
-                      <a:srgbClr val="1E3A8A"/>
-                    </a:solidFill>
-                  </a:tcPr>
-                </a:tc>
-                <a:tc>
-                  <a:txBody>
-                    <a:bodyPr/>
-                    <a:lstStyle/>
-                    <a:p>
-                      <a:pPr algn="ctr">
-                        <a:defRPr sz="919" b="1">
-                          <a:solidFill>
-                            <a:srgbClr val="FFFFFF"/>
-                          </a:solidFill>
-                          <a:latin typeface="Microsoft YaHei"/>
-                        </a:defRPr>
-                      </a:pPr>
-                      <a:r>
-                        <a:t>重点验证工况</a:t>
-                      </a:r>
-                    </a:p>
-                  </a:txBody>
-                  <a:tcPr anchor="ctr">
-                    <a:solidFill>
-                      <a:srgbClr val="1E3A8A"/>
-                    </a:solidFill>
-                  </a:tcPr>
-                </a:tc>
-                <a:tc>
-                  <a:txBody>
-                    <a:bodyPr/>
-                    <a:lstStyle/>
-                    <a:p>
-                      <a:pPr algn="ctr">
-                        <a:defRPr sz="919" b="1">
-                          <a:solidFill>
-                            <a:srgbClr val="FFFFFF"/>
-                          </a:solidFill>
-                          <a:latin typeface="Microsoft YaHei"/>
-                        </a:defRPr>
-                      </a:pPr>
-                      <a:r>
-                        <a:t>观察指标与交付成果</a:t>
-                      </a:r>
-                    </a:p>
-                  </a:txBody>
-                  <a:tcPr anchor="ctr">
-                    <a:solidFill>
-                      <a:srgbClr val="1E3A8A"/>
-                    </a:solidFill>
-                  </a:tcPr>
-                </a:tc>
-              </a:tr>
-              <a:tr h="603504">
-                <a:tc>
-                  <a:txBody>
-                    <a:bodyPr/>
-                    <a:lstStyle/>
-                    <a:p>
-                      <a:pPr algn="ctr">
-                        <a:defRPr sz="850" b="1">
-                          <a:solidFill>
-                            <a:srgbClr val="1E3A8A"/>
-                          </a:solidFill>
-                          <a:latin typeface="Microsoft YaHei"/>
-                        </a:defRPr>
-                      </a:pPr>
-                      <a:r>
-                        <a:t>控制面优化</a:t>
-                      </a:r>
-                    </a:p>
-                  </a:txBody>
-                  <a:tcPr anchor="ctr" marL="73152" marR="73152" marT="36576" marB="36576">
-                    <a:solidFill>
-                      <a:srgbClr val="FFFFFF"/>
-                    </a:solidFill>
-                  </a:tcPr>
-                </a:tc>
-                <a:tc>
-                  <a:txBody>
-                    <a:bodyPr/>
-                    <a:lstStyle/>
-                    <a:p>
-                      <a:pPr>
-                        <a:defRPr sz="850">
-                          <a:solidFill>
-                            <a:srgbClr val="0F172A"/>
-                          </a:solidFill>
-                          <a:latin typeface="Microsoft YaHei"/>
-                        </a:defRPr>
-                      </a:pPr>
-                      <a:r>
-                        <a:t>复核检索基线与统计口径；</a:t>
-                      </a:r>
-                      <a:br/>
-                      <a:r>
-                        <a:t>补充查询、注册、提交和排队的耗时分解</a:t>
-                      </a:r>
-                    </a:p>
-                  </a:txBody>
-                  <a:tcPr anchor="ctr" marL="73152" marR="73152" marT="36576" marB="36576">
-                    <a:solidFill>
-                      <a:srgbClr val="FFFFFF"/>
-                    </a:solidFill>
-                  </a:tcPr>
-                </a:tc>
-                <a:tc>
-                  <a:txBody>
-                    <a:bodyPr/>
-                    <a:lstStyle/>
-                    <a:p>
-                      <a:pPr>
-                        <a:defRPr sz="850">
-                          <a:solidFill>
-                            <a:srgbClr val="0F172A"/>
-                          </a:solidFill>
-                          <a:latin typeface="Microsoft YaHei"/>
-                        </a:defRPr>
-                      </a:pPr>
-                      <a:r>
-                        <a:t>低载、高复用快加载；</a:t>
-                      </a:r>
-                      <a:br/>
-                      <a:r>
-                        <a:t>控制服务接近饱和的高并发场景</a:t>
-                      </a:r>
-                    </a:p>
-                  </a:txBody>
-                  <a:tcPr anchor="ctr" marL="73152" marR="73152" marT="36576" marB="36576">
-                    <a:solidFill>
-                      <a:srgbClr val="FFFFFF"/>
-                    </a:solidFill>
-                  </a:tcPr>
-                </a:tc>
-                <a:tc>
-                  <a:txBody>
-                    <a:bodyPr/>
-                    <a:lstStyle/>
-                    <a:p>
-                      <a:pPr>
-                        <a:defRPr sz="850">
-                          <a:solidFill>
-                            <a:srgbClr val="0F172A"/>
-                          </a:solidFill>
-                          <a:latin typeface="Microsoft YaHei"/>
-                        </a:defRPr>
-                      </a:pPr>
-                      <a:r>
-                        <a:t>查询 / 提交开销、TTFT、P99 尾部时延</a:t>
-                      </a:r>
-                      <a:br/>
-                      <a:r>
-                        <a:t>检索对照与在线影响分析报告</a:t>
-                      </a:r>
-                    </a:p>
-                  </a:txBody>
-                  <a:tcPr anchor="ctr" marL="73152" marR="73152" marT="36576" marB="36576">
-                    <a:solidFill>
-                      <a:srgbClr val="FFFFFF"/>
-                    </a:solidFill>
-                  </a:tcPr>
-                </a:tc>
-              </a:tr>
-              <a:tr h="603504">
-                <a:tc>
-                  <a:txBody>
-                    <a:bodyPr/>
-                    <a:lstStyle/>
-                    <a:p>
-                      <a:pPr algn="ctr">
-                        <a:defRPr sz="850" b="1">
-                          <a:solidFill>
-                            <a:srgbClr val="1E3A8A"/>
-                          </a:solidFill>
-                          <a:latin typeface="Microsoft YaHei"/>
-                        </a:defRPr>
-                      </a:pPr>
-                      <a:r>
-                        <a:t>数据面优化</a:t>
-                      </a:r>
-                    </a:p>
-                  </a:txBody>
-                  <a:tcPr anchor="ctr" marL="73152" marR="73152" marT="36576" marB="36576">
-                    <a:solidFill>
-                      <a:srgbClr val="F1F5F9"/>
-                    </a:solidFill>
-                  </a:tcPr>
-                </a:tc>
-                <a:tc>
-                  <a:txBody>
-                    <a:bodyPr/>
-                    <a:lstStyle/>
-                    <a:p>
-                      <a:pPr>
-                        <a:defRPr sz="850">
-                          <a:solidFill>
-                            <a:srgbClr val="0F172A"/>
-                          </a:solidFill>
-                          <a:latin typeface="Microsoft YaHei"/>
-                        </a:defRPr>
-                      </a:pPr>
-                      <a:r>
-                        <a:t>比较业务块粒度、连续程度和提交方式；</a:t>
-                      </a:r>
-                      <a:br/>
-                      <a:r>
-                        <a:t>对照直达、中转与按层流水的实际开销</a:t>
-                      </a:r>
-                    </a:p>
-                  </a:txBody>
-                  <a:tcPr anchor="ctr" marL="73152" marR="73152" marT="36576" marB="36576">
-                    <a:solidFill>
-                      <a:srgbClr val="F1F5F9"/>
-                    </a:solidFill>
-                  </a:tcPr>
-                </a:tc>
-                <a:tc>
-                  <a:txBody>
-                    <a:bodyPr/>
-                    <a:lstStyle/>
-                    <a:p>
-                      <a:pPr>
-                        <a:defRPr sz="850">
-                          <a:solidFill>
-                            <a:srgbClr val="0F172A"/>
-                          </a:solidFill>
-                          <a:latin typeface="Microsoft YaHei"/>
-                        </a:defRPr>
-                      </a:pPr>
-                      <a:r>
-                        <a:t>长前缀、碎片化 KV；</a:t>
-                      </a:r>
-                      <a:br/>
-                      <a:r>
-                        <a:t>多通道与逐层召回场景</a:t>
-                      </a:r>
-                    </a:p>
-                  </a:txBody>
-                  <a:tcPr anchor="ctr" marL="73152" marR="73152" marT="36576" marB="36576">
-                    <a:solidFill>
-                      <a:srgbClr val="F1F5F9"/>
-                    </a:solidFill>
-                  </a:tcPr>
-                </a:tc>
-                <a:tc>
-                  <a:txBody>
-                    <a:bodyPr/>
-                    <a:lstStyle/>
-                    <a:p>
-                      <a:pPr>
-                        <a:defRPr sz="850">
-                          <a:solidFill>
-                            <a:srgbClr val="0F172A"/>
-                          </a:solidFill>
-                          <a:latin typeface="Microsoft YaHei"/>
-                        </a:defRPr>
-                      </a:pPr>
-                      <a:r>
-                        <a:t>搬运字节、有效带宽、首层等待时间</a:t>
-                      </a:r>
-                      <a:br/>
-                      <a:r>
-                        <a:t>加载分解及 TTFT / TPOT 对照数据</a:t>
-                      </a:r>
-                    </a:p>
-                  </a:txBody>
-                  <a:tcPr anchor="ctr" marL="73152" marR="73152" marT="36576" marB="36576">
-                    <a:solidFill>
-                      <a:srgbClr val="F1F5F9"/>
-                    </a:solidFill>
-                  </a:tcPr>
-                </a:tc>
-              </a:tr>
-              <a:tr h="603504">
-                <a:tc>
-                  <a:txBody>
-                    <a:bodyPr/>
-                    <a:lstStyle/>
-                    <a:p>
-                      <a:pPr algn="ctr">
-                        <a:defRPr sz="850" b="1">
-                          <a:solidFill>
-                            <a:srgbClr val="1E3A8A"/>
-                          </a:solidFill>
-                          <a:latin typeface="Microsoft YaHei"/>
-                        </a:defRPr>
-                      </a:pPr>
-                      <a:r>
-                        <a:t>组合与混压</a:t>
-                      </a:r>
-                    </a:p>
-                  </a:txBody>
-                  <a:tcPr anchor="ctr" marL="73152" marR="73152" marT="36576" marB="36576">
-                    <a:solidFill>
-                      <a:srgbClr val="FFFFFF"/>
-                    </a:solidFill>
-                  </a:tcPr>
-                </a:tc>
-                <a:tc>
-                  <a:txBody>
-                    <a:bodyPr/>
-                    <a:lstStyle/>
-                    <a:p>
-                      <a:pPr>
-                        <a:defRPr sz="850">
-                          <a:solidFill>
-                            <a:srgbClr val="0F172A"/>
-                          </a:solidFill>
-                          <a:latin typeface="Microsoft YaHei"/>
-                        </a:defRPr>
-                      </a:pPr>
-                      <a:r>
-                        <a:t>在代表工况组合有效机制；</a:t>
-                      </a:r>
-                      <a:br/>
-                      <a:r>
-                        <a:t>记录前台推理与后台搬运的实际通路和资源使用</a:t>
-                      </a:r>
-                    </a:p>
-                  </a:txBody>
-                  <a:tcPr anchor="ctr" marL="73152" marR="73152" marT="36576" marB="36576">
-                    <a:solidFill>
-                      <a:srgbClr val="FFFFFF"/>
-                    </a:solidFill>
-                  </a:tcPr>
-                </a:tc>
-                <a:tc>
-                  <a:txBody>
-                    <a:bodyPr/>
-                    <a:lstStyle/>
-                    <a:p>
-                      <a:pPr>
-                        <a:defRPr sz="850">
-                          <a:solidFill>
-                            <a:srgbClr val="0F172A"/>
-                          </a:solidFill>
-                          <a:latin typeface="Microsoft YaHei"/>
-                        </a:defRPr>
-                      </a:pPr>
-                      <a:r>
-                        <a:t>正常 / 拥塞网络；</a:t>
-                      </a:r>
-                      <a:br/>
-                      <a:r>
-                        <a:t>纯前台与固定后台高吞吐搬运混压</a:t>
-                      </a:r>
-                    </a:p>
-                  </a:txBody>
-                  <a:tcPr anchor="ctr" marL="73152" marR="73152" marT="36576" marB="36576">
-                    <a:solidFill>
-                      <a:srgbClr val="FFFFFF"/>
-                    </a:solidFill>
-                  </a:tcPr>
-                </a:tc>
-                <a:tc>
-                  <a:txBody>
-                    <a:bodyPr/>
-                    <a:lstStyle/>
-                    <a:p>
-                      <a:pPr>
-                        <a:defRPr sz="850">
-                          <a:solidFill>
-                            <a:srgbClr val="0F172A"/>
-                          </a:solidFill>
-                          <a:latin typeface="Microsoft YaHei"/>
-                        </a:defRPr>
-                      </a:pPr>
-                      <a:r>
-                        <a:t>TTFT、TPOT、有效 QPS 达标率</a:t>
-                      </a:r>
-                      <a:br/>
-                      <a:r>
-                        <a:t>后台进度及资源代价平衡曲线</a:t>
-                      </a:r>
-                    </a:p>
-                  </a:txBody>
-                  <a:tcPr anchor="ctr" marL="73152" marR="73152" marT="36576" marB="36576">
-                    <a:solidFill>
-                      <a:srgbClr val="FFFFFF"/>
-                    </a:solidFill>
-                  </a:tcPr>
-                </a:tc>
-              </a:tr>
-              <a:tr h="603504">
-                <a:tc>
-                  <a:txBody>
-                    <a:bodyPr/>
-                    <a:lstStyle/>
-                    <a:p>
-                      <a:pPr algn="ctr">
-                        <a:defRPr sz="850" b="1">
-                          <a:solidFill>
-                            <a:srgbClr val="1E3A8A"/>
-                          </a:solidFill>
-                          <a:latin typeface="Microsoft YaHei"/>
-                        </a:defRPr>
-                      </a:pPr>
-                      <a:r>
-                        <a:t>软硬协同研究</a:t>
-                      </a:r>
-                    </a:p>
-                  </a:txBody>
-                  <a:tcPr anchor="ctr" marL="73152" marR="73152" marT="36576" marB="36576">
-                    <a:solidFill>
-                      <a:srgbClr val="F1F5F9"/>
-                    </a:solidFill>
-                  </a:tcPr>
-                </a:tc>
-                <a:tc>
-                  <a:txBody>
-                    <a:bodyPr/>
-                    <a:lstStyle/>
-                    <a:p>
-                      <a:pPr>
-                        <a:defRPr sz="850">
-                          <a:solidFill>
-                            <a:srgbClr val="0F172A"/>
-                          </a:solidFill>
-                          <a:latin typeface="Microsoft YaHei"/>
-                        </a:defRPr>
-                      </a:pPr>
-                      <a:r>
-                        <a:t>按表示、放置、访问和执行梳理物理瓶颈；</a:t>
-                      </a:r>
-                      <a:br/>
-                      <a:r>
-                        <a:t>评估布局转换、稳定描述符、拓扑与队列能力</a:t>
-                      </a:r>
-                    </a:p>
-                  </a:txBody>
-                  <a:tcPr anchor="ctr" marL="73152" marR="73152" marT="36576" marB="36576">
-                    <a:solidFill>
-                      <a:srgbClr val="F1F5F9"/>
-                    </a:solidFill>
-                  </a:tcPr>
-                </a:tc>
-                <a:tc>
-                  <a:txBody>
-                    <a:bodyPr/>
-                    <a:lstStyle/>
-                    <a:p>
-                      <a:pPr>
-                        <a:defRPr sz="850">
-                          <a:solidFill>
-                            <a:srgbClr val="0F172A"/>
-                          </a:solidFill>
-                          <a:latin typeface="Microsoft YaHei"/>
-                        </a:defRPr>
-                      </a:pPr>
-                      <a:r>
-                        <a:t>依托现有设备和验证原型；</a:t>
-                      </a:r>
-                      <a:br/>
-                      <a:r>
-                        <a:t>对应具体访问粒度与消费方式</a:t>
-                      </a:r>
-                    </a:p>
-                  </a:txBody>
-                  <a:tcPr anchor="ctr" marL="73152" marR="73152" marT="36576" marB="36576">
-                    <a:solidFill>
-                      <a:srgbClr val="F1F5F9"/>
-                    </a:solidFill>
-                  </a:tcPr>
-                </a:tc>
-                <a:tc>
-                  <a:txBody>
-                    <a:bodyPr/>
-                    <a:lstStyle/>
-                    <a:p>
-                      <a:pPr>
-                        <a:defRPr sz="850">
-                          <a:solidFill>
-                            <a:srgbClr val="0F172A"/>
-                          </a:solidFill>
-                          <a:latin typeface="Microsoft YaHei"/>
-                        </a:defRPr>
-                      </a:pPr>
-                      <a:r>
-                        <a:t>机制—物理开销—业务指标映射分析</a:t>
-                      </a:r>
-                      <a:br/>
-                      <a:r>
-                        <a:t>共性硬件能力清单与候选芯片课题</a:t>
-                      </a:r>
-                    </a:p>
-                  </a:txBody>
-                  <a:tcPr anchor="ctr" marL="73152" marR="73152" marT="36576" marB="36576">
-                    <a:solidFill>
-                      <a:srgbClr val="F1F5F9"/>
-                    </a:solidFill>
-                  </a:tcPr>
-                </a:tc>
-              </a:tr>
-            </a:tbl>
-          </a:graphicData>
-        </a:graphic>
-      </p:graphicFrame>
-      <p:sp>
-        <p:nvSpPr>
-          <p:cNvPr id="9" name="TextBox 8"/>
+              <a:t>以已有控制面与数据面优化成果为基石，推动研发从“单点原型实测”向“端到端全链混压”、“生产级工程落地”与“国产芯片软硬协同反哺”三阶跨越。</a:t>
+            </a:r>
+          </a:p>
+        </p:txBody>
+      </p:sp>
+      <p:sp>
+        <p:nvSpPr>
+          <p:cNvPr id="8" name="TextBox 7"/>
           <p:cNvSpPr txBox="1"/>
           <p:nvPr/>
         </p:nvSpPr>
         <p:spPr>
           <a:xfrm>
-            <a:off x="457200" y="4434840"/>
-            <a:ext cx="11277295" cy="256032"/>
+            <a:off x="457200" y="1225296"/>
+            <a:ext cx="11277295" cy="219456"/>
           </a:xfrm>
           <a:prstGeom prst="rect">
             <a:avLst/>
@@ -8694,21 +8160,21 @@
               </a:defRPr>
             </a:pPr>
             <a:r>
-              <a:t>【三周推进安排与节奏规划】</a:t>
-            </a:r>
-          </a:p>
-        </p:txBody>
-      </p:sp>
-      <p:sp>
-        <p:nvSpPr>
-          <p:cNvPr id="10" name="Rectangle 9"/>
+              <a:t>【战略演进：从单点技术验证向系统级闭环的三阶段演进】</a:t>
+            </a:r>
+          </a:p>
+        </p:txBody>
+      </p:sp>
+      <p:sp>
+        <p:nvSpPr>
+          <p:cNvPr id="9" name="Rectangle 8"/>
           <p:cNvSpPr/>
           <p:nvPr/>
         </p:nvSpPr>
         <p:spPr>
           <a:xfrm>
-            <a:off x="457200" y="4754880"/>
-            <a:ext cx="3611880" cy="1554480"/>
+            <a:off x="457200" y="1481328"/>
+            <a:ext cx="3493008" cy="2066543"/>
           </a:xfrm>
           <a:prstGeom prst="rect">
             <a:avLst/>
@@ -8746,14 +8212,1435 @@
       </p:sp>
       <p:sp>
         <p:nvSpPr>
-          <p:cNvPr id="11" name="Rectangle 10"/>
+          <p:cNvPr id="10" name="Rectangle 9"/>
           <p:cNvSpPr/>
           <p:nvPr/>
         </p:nvSpPr>
         <p:spPr>
           <a:xfrm>
-            <a:off x="457200" y="4754880"/>
-            <a:ext cx="3611880" cy="292608"/>
+            <a:off x="457200" y="1481328"/>
+            <a:ext cx="3493008" cy="274320"/>
+          </a:xfrm>
+          <a:prstGeom prst="rect">
+            <a:avLst/>
+          </a:prstGeom>
+          <a:solidFill>
+            <a:srgbClr val="F1F5F9"/>
+          </a:solidFill>
+          <a:ln w="10160">
+            <a:solidFill>
+              <a:srgbClr val="CBD5E1"/>
+            </a:solidFill>
+          </a:ln>
+        </p:spPr>
+        <p:style>
+          <a:lnRef idx="1">
+            <a:schemeClr val="accent1"/>
+          </a:lnRef>
+          <a:fillRef idx="3">
+            <a:schemeClr val="accent1"/>
+          </a:fillRef>
+          <a:effectRef idx="2">
+            <a:schemeClr val="accent1"/>
+          </a:effectRef>
+          <a:fontRef idx="minor">
+            <a:schemeClr val="lt1"/>
+          </a:fontRef>
+        </p:style>
+        <p:txBody>
+          <a:bodyPr rtlCol="0" anchor="ctr"/>
+          <a:lstStyle/>
+          <a:p>
+            <a:pPr algn="ctr"/>
+          </a:p>
+        </p:txBody>
+      </p:sp>
+      <p:sp>
+        <p:nvSpPr>
+          <p:cNvPr id="11" name="TextBox 10"/>
+          <p:cNvSpPr txBox="1"/>
+          <p:nvPr/>
+        </p:nvSpPr>
+        <p:spPr>
+          <a:xfrm>
+            <a:off x="530352" y="1517904"/>
+            <a:ext cx="3346704" cy="219456"/>
+          </a:xfrm>
+          <a:prstGeom prst="rect">
+            <a:avLst/>
+          </a:prstGeom>
+          <a:noFill/>
+        </p:spPr>
+        <p:txBody>
+          <a:bodyPr wrap="none" lIns="0" tIns="0" rIns="0" bIns="0">
+            <a:spAutoFit/>
+          </a:bodyPr>
+          <a:lstStyle/>
+          <a:p>
+            <a:pPr>
+              <a:defRPr sz="860" b="1">
+                <a:solidFill>
+                  <a:srgbClr val="1E3A8A"/>
+                </a:solidFill>
+                <a:latin typeface="Microsoft YaHei"/>
+              </a:defRPr>
+            </a:pPr>
+            <a:r>
+              <a:t>阶段一：全链混压与门禁达标 (近期 1~3 周 · 原型闭环)</a:t>
+            </a:r>
+          </a:p>
+        </p:txBody>
+      </p:sp>
+      <p:sp>
+        <p:nvSpPr>
+          <p:cNvPr id="12" name="TextBox 11"/>
+          <p:cNvSpPr txBox="1"/>
+          <p:nvPr/>
+        </p:nvSpPr>
+        <p:spPr>
+          <a:xfrm>
+            <a:off x="548640" y="1792224"/>
+            <a:ext cx="3310128" cy="1719071"/>
+          </a:xfrm>
+          <a:prstGeom prst="rect">
+            <a:avLst/>
+          </a:prstGeom>
+          <a:noFill/>
+        </p:spPr>
+        <p:txBody>
+          <a:bodyPr wrap="square" lIns="0" tIns="0" rIns="0" bIns="0">
+            <a:spAutoFit/>
+          </a:bodyPr>
+          <a:lstStyle/>
+          <a:p>
+            <a:pPr>
+              <a:defRPr sz="760">
+                <a:solidFill>
+                  <a:srgbClr val="0F172A"/>
+                </a:solidFill>
+                <a:latin typeface="Microsoft YaHei"/>
+              </a:defRPr>
+            </a:pPr>
+            <a:r>
+              <a:t>• 机制组合串联：将控制面共享快路径与数据面连续聚合打通，验证端到端全链路加速复合增益。</a:t>
+            </a:r>
+          </a:p>
+          <a:p>
+            <a:pPr>
+              <a:spcBef>
+                <a:spcPts val="300"/>
+              </a:spcBef>
+              <a:defRPr sz="760">
+                <a:solidFill>
+                  <a:srgbClr val="0F172A"/>
+                </a:solidFill>
+                <a:latin typeface="Microsoft YaHei"/>
+              </a:defRPr>
+            </a:pPr>
+            <a:r>
+              <a:t>• 真实双节点混压：前台在线推理与后台满载 I/O 深度混压，压测高并发下 P99 尾部时延稳定性。</a:t>
+            </a:r>
+          </a:p>
+          <a:p>
+            <a:pPr>
+              <a:spcBef>
+                <a:spcPts val="300"/>
+              </a:spcBef>
+              <a:defRPr sz="760">
+                <a:solidFill>
+                  <a:srgbClr val="0F172A"/>
+                </a:solidFill>
+                <a:latin typeface="Microsoft YaHei"/>
+              </a:defRPr>
+            </a:pPr>
+            <a:r>
+              <a:t>• 验收门禁达标：实测达成 TTFT 缩短 ≥20%、有效 QPS 提升 ≥10% 且前台 TPOT 干扰率 &lt;3%。</a:t>
+            </a:r>
+          </a:p>
+          <a:p>
+            <a:pPr>
+              <a:spcBef>
+                <a:spcPts val="300"/>
+              </a:spcBef>
+              <a:defRPr sz="760">
+                <a:solidFill>
+                  <a:srgbClr val="0F172A"/>
+                </a:solidFill>
+                <a:latin typeface="Microsoft YaHei"/>
+              </a:defRPr>
+            </a:pPr>
+            <a:r>
+              <a:t>• 边界摸底冻结：绘制全工况加速与资源代价平衡曲线，明确有效工况区间，彻底杜绝负收益反噬。</a:t>
+            </a:r>
+          </a:p>
+        </p:txBody>
+      </p:sp>
+      <p:sp>
+        <p:nvSpPr>
+          <p:cNvPr id="13" name="TextBox 12"/>
+          <p:cNvSpPr txBox="1"/>
+          <p:nvPr/>
+        </p:nvSpPr>
+        <p:spPr>
+          <a:xfrm>
+            <a:off x="3950208" y="2286000"/>
+            <a:ext cx="393192" cy="365760"/>
+          </a:xfrm>
+          <a:prstGeom prst="rect">
+            <a:avLst/>
+          </a:prstGeom>
+          <a:noFill/>
+        </p:spPr>
+        <p:txBody>
+          <a:bodyPr wrap="none" lIns="0" tIns="0" rIns="0" bIns="0">
+            <a:spAutoFit/>
+          </a:bodyPr>
+          <a:lstStyle/>
+          <a:p>
+            <a:pPr algn="ctr">
+              <a:defRPr sz="1400" b="1">
+                <a:solidFill>
+                  <a:srgbClr val="1D4ED8"/>
+                </a:solidFill>
+                <a:latin typeface="Microsoft YaHei"/>
+              </a:defRPr>
+            </a:pPr>
+            <a:r>
+              <a:t>➔</a:t>
+            </a:r>
+          </a:p>
+        </p:txBody>
+      </p:sp>
+      <p:sp>
+        <p:nvSpPr>
+          <p:cNvPr id="14" name="Rectangle 13"/>
+          <p:cNvSpPr/>
+          <p:nvPr/>
+        </p:nvSpPr>
+        <p:spPr>
+          <a:xfrm>
+            <a:off x="4343400" y="1481328"/>
+            <a:ext cx="3493008" cy="2066543"/>
+          </a:xfrm>
+          <a:prstGeom prst="rect">
+            <a:avLst/>
+          </a:prstGeom>
+          <a:solidFill>
+            <a:srgbClr val="EFF6FF"/>
+          </a:solidFill>
+          <a:ln w="15240">
+            <a:solidFill>
+              <a:srgbClr val="1D4ED8"/>
+            </a:solidFill>
+          </a:ln>
+        </p:spPr>
+        <p:style>
+          <a:lnRef idx="1">
+            <a:schemeClr val="accent1"/>
+          </a:lnRef>
+          <a:fillRef idx="3">
+            <a:schemeClr val="accent1"/>
+          </a:fillRef>
+          <a:effectRef idx="2">
+            <a:schemeClr val="accent1"/>
+          </a:effectRef>
+          <a:fontRef idx="minor">
+            <a:schemeClr val="lt1"/>
+          </a:fontRef>
+        </p:style>
+        <p:txBody>
+          <a:bodyPr rtlCol="0" anchor="ctr"/>
+          <a:lstStyle/>
+          <a:p>
+            <a:pPr algn="ctr"/>
+          </a:p>
+        </p:txBody>
+      </p:sp>
+      <p:sp>
+        <p:nvSpPr>
+          <p:cNvPr id="15" name="Rectangle 14"/>
+          <p:cNvSpPr/>
+          <p:nvPr/>
+        </p:nvSpPr>
+        <p:spPr>
+          <a:xfrm>
+            <a:off x="4343400" y="1481328"/>
+            <a:ext cx="3493008" cy="274320"/>
+          </a:xfrm>
+          <a:prstGeom prst="rect">
+            <a:avLst/>
+          </a:prstGeom>
+          <a:solidFill>
+            <a:srgbClr val="1E3A8A"/>
+          </a:solidFill>
+          <a:ln w="10160">
+            <a:solidFill>
+              <a:srgbClr val="CBD5E1"/>
+            </a:solidFill>
+          </a:ln>
+        </p:spPr>
+        <p:style>
+          <a:lnRef idx="1">
+            <a:schemeClr val="accent1"/>
+          </a:lnRef>
+          <a:fillRef idx="3">
+            <a:schemeClr val="accent1"/>
+          </a:fillRef>
+          <a:effectRef idx="2">
+            <a:schemeClr val="accent1"/>
+          </a:effectRef>
+          <a:fontRef idx="minor">
+            <a:schemeClr val="lt1"/>
+          </a:fontRef>
+        </p:style>
+        <p:txBody>
+          <a:bodyPr rtlCol="0" anchor="ctr"/>
+          <a:lstStyle/>
+          <a:p>
+            <a:pPr algn="ctr"/>
+          </a:p>
+        </p:txBody>
+      </p:sp>
+      <p:sp>
+        <p:nvSpPr>
+          <p:cNvPr id="16" name="TextBox 15"/>
+          <p:cNvSpPr txBox="1"/>
+          <p:nvPr/>
+        </p:nvSpPr>
+        <p:spPr>
+          <a:xfrm>
+            <a:off x="4416552" y="1517904"/>
+            <a:ext cx="3346704" cy="219456"/>
+          </a:xfrm>
+          <a:prstGeom prst="rect">
+            <a:avLst/>
+          </a:prstGeom>
+          <a:noFill/>
+        </p:spPr>
+        <p:txBody>
+          <a:bodyPr wrap="none" lIns="0" tIns="0" rIns="0" bIns="0">
+            <a:spAutoFit/>
+          </a:bodyPr>
+          <a:lstStyle/>
+          <a:p>
+            <a:pPr>
+              <a:defRPr sz="860" b="1">
+                <a:solidFill>
+                  <a:srgbClr val="FFFFFF"/>
+                </a:solidFill>
+                <a:latin typeface="Microsoft YaHei"/>
+              </a:defRPr>
+            </a:pPr>
+            <a:r>
+              <a:t>阶段二：引擎集成与系统工程化 (中期 1~2 个月 · 生产就绪)</a:t>
+            </a:r>
+          </a:p>
+        </p:txBody>
+      </p:sp>
+      <p:sp>
+        <p:nvSpPr>
+          <p:cNvPr id="17" name="TextBox 16"/>
+          <p:cNvSpPr txBox="1"/>
+          <p:nvPr/>
+        </p:nvSpPr>
+        <p:spPr>
+          <a:xfrm>
+            <a:off x="4434840" y="1792224"/>
+            <a:ext cx="3310128" cy="1719071"/>
+          </a:xfrm>
+          <a:prstGeom prst="rect">
+            <a:avLst/>
+          </a:prstGeom>
+          <a:noFill/>
+        </p:spPr>
+        <p:txBody>
+          <a:bodyPr wrap="square" lIns="0" tIns="0" rIns="0" bIns="0">
+            <a:spAutoFit/>
+          </a:bodyPr>
+          <a:lstStyle/>
+          <a:p>
+            <a:pPr>
+              <a:defRPr sz="760">
+                <a:solidFill>
+                  <a:srgbClr val="0F172A"/>
+                </a:solidFill>
+                <a:latin typeface="Microsoft YaHei"/>
+              </a:defRPr>
+            </a:pPr>
+            <a:r>
+              <a:t>• 主流引擎生态集成：无缝嵌入开源推理框架（vLLM / SGLang），实现原厂存储插件化无感接入。</a:t>
+            </a:r>
+          </a:p>
+          <a:p>
+            <a:pPr>
+              <a:spcBef>
+                <a:spcPts val="300"/>
+              </a:spcBef>
+              <a:defRPr sz="760">
+                <a:solidFill>
+                  <a:srgbClr val="0F172A"/>
+                </a:solidFill>
+                <a:latin typeface="Microsoft YaHei"/>
+              </a:defRPr>
+            </a:pPr>
+            <a:r>
+              <a:t>• 张量并行多卡协同：打通 TP=8 多卡状态同步机制，消除多卡并发独立检索与通信死锁隐患。</a:t>
+            </a:r>
+          </a:p>
+          <a:p>
+            <a:pPr>
+              <a:spcBef>
+                <a:spcPts val="300"/>
+              </a:spcBef>
+              <a:defRPr sz="760">
+                <a:solidFill>
+                  <a:srgbClr val="0F172A"/>
+                </a:solidFill>
+                <a:latin typeface="Microsoft YaHei"/>
+              </a:defRPr>
+            </a:pPr>
+            <a:r>
+              <a:t>• 多级存储自动分层：打通 HBM ↔ Host DDR ↔ NVMe SSD 自动流转，实现低成本大容量扩展。</a:t>
+            </a:r>
+          </a:p>
+          <a:p>
+            <a:pPr>
+              <a:spcBef>
+                <a:spcPts val="300"/>
+              </a:spcBef>
+              <a:defRPr sz="760">
+                <a:solidFill>
+                  <a:srgbClr val="0F172A"/>
+                </a:solidFill>
+                <a:latin typeface="Microsoft YaHei"/>
+              </a:defRPr>
+            </a:pPr>
+            <a:r>
+              <a:t>• 生产级可用性加固：完善视图租约安全守卫机制，实现节点故障微秒级安全回滚与高可用。</a:t>
+            </a:r>
+          </a:p>
+        </p:txBody>
+      </p:sp>
+      <p:sp>
+        <p:nvSpPr>
+          <p:cNvPr id="18" name="TextBox 17"/>
+          <p:cNvSpPr txBox="1"/>
+          <p:nvPr/>
+        </p:nvSpPr>
+        <p:spPr>
+          <a:xfrm>
+            <a:off x="7836408" y="2286000"/>
+            <a:ext cx="393192" cy="365760"/>
+          </a:xfrm>
+          <a:prstGeom prst="rect">
+            <a:avLst/>
+          </a:prstGeom>
+          <a:noFill/>
+        </p:spPr>
+        <p:txBody>
+          <a:bodyPr wrap="none" lIns="0" tIns="0" rIns="0" bIns="0">
+            <a:spAutoFit/>
+          </a:bodyPr>
+          <a:lstStyle/>
+          <a:p>
+            <a:pPr algn="ctr">
+              <a:defRPr sz="1400" b="1">
+                <a:solidFill>
+                  <a:srgbClr val="1D4ED8"/>
+                </a:solidFill>
+                <a:latin typeface="Microsoft YaHei"/>
+              </a:defRPr>
+            </a:pPr>
+            <a:r>
+              <a:t>➔</a:t>
+            </a:r>
+          </a:p>
+        </p:txBody>
+      </p:sp>
+      <p:sp>
+        <p:nvSpPr>
+          <p:cNvPr id="19" name="Rectangle 18"/>
+          <p:cNvSpPr/>
+          <p:nvPr/>
+        </p:nvSpPr>
+        <p:spPr>
+          <a:xfrm>
+            <a:off x="8229600" y="1481328"/>
+            <a:ext cx="3493008" cy="2066543"/>
+          </a:xfrm>
+          <a:prstGeom prst="rect">
+            <a:avLst/>
+          </a:prstGeom>
+          <a:solidFill>
+            <a:srgbClr val="ECFDF5"/>
+          </a:solidFill>
+          <a:ln w="15240">
+            <a:solidFill>
+              <a:srgbClr val="047857"/>
+            </a:solidFill>
+          </a:ln>
+        </p:spPr>
+        <p:style>
+          <a:lnRef idx="1">
+            <a:schemeClr val="accent1"/>
+          </a:lnRef>
+          <a:fillRef idx="3">
+            <a:schemeClr val="accent1"/>
+          </a:fillRef>
+          <a:effectRef idx="2">
+            <a:schemeClr val="accent1"/>
+          </a:effectRef>
+          <a:fontRef idx="minor">
+            <a:schemeClr val="lt1"/>
+          </a:fontRef>
+        </p:style>
+        <p:txBody>
+          <a:bodyPr rtlCol="0" anchor="ctr"/>
+          <a:lstStyle/>
+          <a:p>
+            <a:pPr algn="ctr"/>
+          </a:p>
+        </p:txBody>
+      </p:sp>
+      <p:sp>
+        <p:nvSpPr>
+          <p:cNvPr id="20" name="Rectangle 19"/>
+          <p:cNvSpPr/>
+          <p:nvPr/>
+        </p:nvSpPr>
+        <p:spPr>
+          <a:xfrm>
+            <a:off x="8229600" y="1481328"/>
+            <a:ext cx="3493008" cy="274320"/>
+          </a:xfrm>
+          <a:prstGeom prst="rect">
+            <a:avLst/>
+          </a:prstGeom>
+          <a:solidFill>
+            <a:srgbClr val="047857"/>
+          </a:solidFill>
+          <a:ln w="10160">
+            <a:solidFill>
+              <a:srgbClr val="CBD5E1"/>
+            </a:solidFill>
+          </a:ln>
+        </p:spPr>
+        <p:style>
+          <a:lnRef idx="1">
+            <a:schemeClr val="accent1"/>
+          </a:lnRef>
+          <a:fillRef idx="3">
+            <a:schemeClr val="accent1"/>
+          </a:fillRef>
+          <a:effectRef idx="2">
+            <a:schemeClr val="accent1"/>
+          </a:effectRef>
+          <a:fontRef idx="minor">
+            <a:schemeClr val="lt1"/>
+          </a:fontRef>
+        </p:style>
+        <p:txBody>
+          <a:bodyPr rtlCol="0" anchor="ctr"/>
+          <a:lstStyle/>
+          <a:p>
+            <a:pPr algn="ctr"/>
+          </a:p>
+        </p:txBody>
+      </p:sp>
+      <p:sp>
+        <p:nvSpPr>
+          <p:cNvPr id="21" name="TextBox 20"/>
+          <p:cNvSpPr txBox="1"/>
+          <p:nvPr/>
+        </p:nvSpPr>
+        <p:spPr>
+          <a:xfrm>
+            <a:off x="8302752" y="1517904"/>
+            <a:ext cx="3346704" cy="219456"/>
+          </a:xfrm>
+          <a:prstGeom prst="rect">
+            <a:avLst/>
+          </a:prstGeom>
+          <a:noFill/>
+        </p:spPr>
+        <p:txBody>
+          <a:bodyPr wrap="none" lIns="0" tIns="0" rIns="0" bIns="0">
+            <a:spAutoFit/>
+          </a:bodyPr>
+          <a:lstStyle/>
+          <a:p>
+            <a:pPr>
+              <a:defRPr sz="860" b="1">
+                <a:solidFill>
+                  <a:srgbClr val="FFFFFF"/>
+                </a:solidFill>
+                <a:latin typeface="Microsoft YaHei"/>
+              </a:defRPr>
+            </a:pPr>
+            <a:r>
+              <a:t>阶段三：软硬协同与芯片架构反哺 (远期 · 体系突破)</a:t>
+            </a:r>
+          </a:p>
+        </p:txBody>
+      </p:sp>
+      <p:sp>
+        <p:nvSpPr>
+          <p:cNvPr id="22" name="TextBox 21"/>
+          <p:cNvSpPr txBox="1"/>
+          <p:nvPr/>
+        </p:nvSpPr>
+        <p:spPr>
+          <a:xfrm>
+            <a:off x="8321040" y="1792224"/>
+            <a:ext cx="3310128" cy="1719071"/>
+          </a:xfrm>
+          <a:prstGeom prst="rect">
+            <a:avLst/>
+          </a:prstGeom>
+          <a:noFill/>
+        </p:spPr>
+        <p:txBody>
+          <a:bodyPr wrap="square" lIns="0" tIns="0" rIns="0" bIns="0">
+            <a:spAutoFit/>
+          </a:bodyPr>
+          <a:lstStyle/>
+          <a:p>
+            <a:pPr>
+              <a:defRPr sz="760">
+                <a:solidFill>
+                  <a:srgbClr val="0F172A"/>
+                </a:solidFill>
+                <a:latin typeface="Microsoft YaHei"/>
+              </a:defRPr>
+            </a:pPr>
+            <a:r>
+              <a:t>• 硬件物理能力抽象：基于原型实测，量化提炼底层通信、DMA 与存储接口的共性物理需求。</a:t>
+            </a:r>
+          </a:p>
+          <a:p>
+            <a:pPr>
+              <a:spcBef>
+                <a:spcPts val="300"/>
+              </a:spcBef>
+              <a:defRPr sz="760">
+                <a:solidFill>
+                  <a:srgbClr val="0F172A"/>
+                </a:solidFill>
+                <a:latin typeface="Microsoft YaHei"/>
+              </a:defRPr>
+            </a:pPr>
+            <a:r>
+              <a:t>• 芯片架构标准反哺：向下一代国产 AI 芯片输入原生连续块合并、设备 DMA 直达等硬件设计规范。</a:t>
+            </a:r>
+          </a:p>
+          <a:p>
+            <a:pPr>
+              <a:spcBef>
+                <a:spcPts val="300"/>
+              </a:spcBef>
+              <a:defRPr sz="760">
+                <a:solidFill>
+                  <a:srgbClr val="0F172A"/>
+                </a:solidFill>
+                <a:latin typeface="Microsoft YaHei"/>
+              </a:defRPr>
+            </a:pPr>
+            <a:r>
+              <a:t>• 原厂全栈协同攻坚：推进原厂编译器、底层通信驱动与芯片硬件跨层协同优化，构筑技术壁垒。</a:t>
+            </a:r>
+          </a:p>
+          <a:p>
+            <a:pPr>
+              <a:spcBef>
+                <a:spcPts val="300"/>
+              </a:spcBef>
+              <a:defRPr sz="760">
+                <a:solidFill>
+                  <a:srgbClr val="0F172A"/>
+                </a:solidFill>
+                <a:latin typeface="Microsoft YaHei"/>
+              </a:defRPr>
+            </a:pPr>
+            <a:r>
+              <a:t>• 行业标准规范输出：沉淀大模型注意力键值缓存统一异构调度与互联技术规范白皮书。</a:t>
+            </a:r>
+          </a:p>
+        </p:txBody>
+      </p:sp>
+      <p:sp>
+        <p:nvSpPr>
+          <p:cNvPr id="23" name="TextBox 22"/>
+          <p:cNvSpPr txBox="1"/>
+          <p:nvPr/>
+        </p:nvSpPr>
+        <p:spPr>
+          <a:xfrm>
+            <a:off x="457200" y="3657600"/>
+            <a:ext cx="11277295" cy="219456"/>
+          </a:xfrm>
+          <a:prstGeom prst="rect">
+            <a:avLst/>
+          </a:prstGeom>
+          <a:noFill/>
+        </p:spPr>
+        <p:txBody>
+          <a:bodyPr wrap="square" lIns="0" tIns="0" rIns="0" bIns="0">
+            <a:spAutoFit/>
+          </a:bodyPr>
+          <a:lstStyle/>
+          <a:p>
+            <a:pPr>
+              <a:defRPr sz="1100" b="1">
+                <a:solidFill>
+                  <a:srgbClr val="1E3A8A"/>
+                </a:solidFill>
+                <a:latin typeface="Microsoft YaHei"/>
+              </a:defRPr>
+            </a:pPr>
+            <a:r>
+              <a:t>【成果交付闭环：从攻坚实测沉淀四大硬核工程资产】</a:t>
+            </a:r>
+          </a:p>
+        </p:txBody>
+      </p:sp>
+      <p:sp>
+        <p:nvSpPr>
+          <p:cNvPr id="24" name="Rectangle 23"/>
+          <p:cNvSpPr/>
+          <p:nvPr/>
+        </p:nvSpPr>
+        <p:spPr>
+          <a:xfrm>
+            <a:off x="457200" y="3913632"/>
+            <a:ext cx="2670048" cy="2066543"/>
+          </a:xfrm>
+          <a:prstGeom prst="rect">
+            <a:avLst/>
+          </a:prstGeom>
+          <a:solidFill>
+            <a:srgbClr val="FFFFFF"/>
+          </a:solidFill>
+          <a:ln w="12700">
+            <a:solidFill>
+              <a:srgbClr val="CBD5E1"/>
+            </a:solidFill>
+          </a:ln>
+        </p:spPr>
+        <p:style>
+          <a:lnRef idx="1">
+            <a:schemeClr val="accent1"/>
+          </a:lnRef>
+          <a:fillRef idx="3">
+            <a:schemeClr val="accent1"/>
+          </a:fillRef>
+          <a:effectRef idx="2">
+            <a:schemeClr val="accent1"/>
+          </a:effectRef>
+          <a:fontRef idx="minor">
+            <a:schemeClr val="lt1"/>
+          </a:fontRef>
+        </p:style>
+        <p:txBody>
+          <a:bodyPr rtlCol="0" anchor="ctr"/>
+          <a:lstStyle/>
+          <a:p>
+            <a:pPr algn="ctr"/>
+          </a:p>
+        </p:txBody>
+      </p:sp>
+      <p:sp>
+        <p:nvSpPr>
+          <p:cNvPr id="25" name="Rectangle 24"/>
+          <p:cNvSpPr/>
+          <p:nvPr/>
+        </p:nvSpPr>
+        <p:spPr>
+          <a:xfrm>
+            <a:off x="457200" y="3913632"/>
+            <a:ext cx="2670048" cy="256032"/>
+          </a:xfrm>
+          <a:prstGeom prst="rect">
+            <a:avLst/>
+          </a:prstGeom>
+          <a:solidFill>
+            <a:srgbClr val="1E3A8A"/>
+          </a:solidFill>
+          <a:ln w="10160">
+            <a:solidFill>
+              <a:srgbClr val="1E3A8A"/>
+            </a:solidFill>
+          </a:ln>
+        </p:spPr>
+        <p:style>
+          <a:lnRef idx="1">
+            <a:schemeClr val="accent1"/>
+          </a:lnRef>
+          <a:fillRef idx="3">
+            <a:schemeClr val="accent1"/>
+          </a:fillRef>
+          <a:effectRef idx="2">
+            <a:schemeClr val="accent1"/>
+          </a:effectRef>
+          <a:fontRef idx="minor">
+            <a:schemeClr val="lt1"/>
+          </a:fontRef>
+        </p:style>
+        <p:txBody>
+          <a:bodyPr rtlCol="0" anchor="ctr"/>
+          <a:lstStyle/>
+          <a:p>
+            <a:pPr algn="ctr"/>
+          </a:p>
+        </p:txBody>
+      </p:sp>
+      <p:sp>
+        <p:nvSpPr>
+          <p:cNvPr id="26" name="TextBox 25"/>
+          <p:cNvSpPr txBox="1"/>
+          <p:nvPr/>
+        </p:nvSpPr>
+        <p:spPr>
+          <a:xfrm>
+            <a:off x="512064" y="3941064"/>
+            <a:ext cx="2560320" cy="201168"/>
+          </a:xfrm>
+          <a:prstGeom prst="rect">
+            <a:avLst/>
+          </a:prstGeom>
+          <a:noFill/>
+        </p:spPr>
+        <p:txBody>
+          <a:bodyPr wrap="none" lIns="0" tIns="0" rIns="0" bIns="0">
+            <a:spAutoFit/>
+          </a:bodyPr>
+          <a:lstStyle/>
+          <a:p>
+            <a:pPr>
+              <a:defRPr sz="850" b="1">
+                <a:solidFill>
+                  <a:srgbClr val="FFFFFF"/>
+                </a:solidFill>
+                <a:latin typeface="Microsoft YaHei"/>
+              </a:defRPr>
+            </a:pPr>
+            <a:r>
+              <a:t>代码资产 · 统一调度底座工程主干</a:t>
+            </a:r>
+          </a:p>
+        </p:txBody>
+      </p:sp>
+      <p:sp>
+        <p:nvSpPr>
+          <p:cNvPr id="27" name="TextBox 26"/>
+          <p:cNvSpPr txBox="1"/>
+          <p:nvPr/>
+        </p:nvSpPr>
+        <p:spPr>
+          <a:xfrm>
+            <a:off x="530352" y="4215384"/>
+            <a:ext cx="2523744" cy="1737359"/>
+          </a:xfrm>
+          <a:prstGeom prst="rect">
+            <a:avLst/>
+          </a:prstGeom>
+          <a:noFill/>
+        </p:spPr>
+        <p:txBody>
+          <a:bodyPr wrap="square" lIns="0" tIns="0" rIns="0" bIns="0">
+            <a:spAutoFit/>
+          </a:bodyPr>
+          <a:lstStyle/>
+          <a:p>
+            <a:pPr>
+              <a:defRPr sz="780" b="1">
+                <a:solidFill>
+                  <a:srgbClr val="1D4ED8"/>
+                </a:solidFill>
+                <a:latin typeface="Microsoft YaHei"/>
+              </a:defRPr>
+            </a:pPr>
+            <a:r>
+              <a:t>【定位】面向国产硬件的高性能原厂重构版主干</a:t>
+            </a:r>
+          </a:p>
+          <a:p>
+            <a:pPr>
+              <a:spcBef>
+                <a:spcPts val="300"/>
+              </a:spcBef>
+              <a:defRPr sz="740">
+                <a:solidFill>
+                  <a:srgbClr val="0F172A"/>
+                </a:solidFill>
+                <a:latin typeface="Microsoft YaHei"/>
+              </a:defRPr>
+            </a:pPr>
+            <a:r>
+              <a:t>• 核心模块：微秒元数据快路径、设备 DMA 直达、连续块分配器、前后台 QoS 限流</a:t>
+            </a:r>
+            <a:br/>
+            <a:r>
+              <a:t>• 质量标准：完全兼容通用生态接口，生产级单测覆盖率 ≥85%，可独立构建交付</a:t>
+            </a:r>
+          </a:p>
+        </p:txBody>
+      </p:sp>
+      <p:sp>
+        <p:nvSpPr>
+          <p:cNvPr id="28" name="Rectangle 27"/>
+          <p:cNvSpPr/>
+          <p:nvPr/>
+        </p:nvSpPr>
+        <p:spPr>
+          <a:xfrm>
+            <a:off x="3319272" y="3913632"/>
+            <a:ext cx="2670048" cy="2066543"/>
+          </a:xfrm>
+          <a:prstGeom prst="rect">
+            <a:avLst/>
+          </a:prstGeom>
+          <a:solidFill>
+            <a:srgbClr val="FFFFFF"/>
+          </a:solidFill>
+          <a:ln w="12700">
+            <a:solidFill>
+              <a:srgbClr val="CBD5E1"/>
+            </a:solidFill>
+          </a:ln>
+        </p:spPr>
+        <p:style>
+          <a:lnRef idx="1">
+            <a:schemeClr val="accent1"/>
+          </a:lnRef>
+          <a:fillRef idx="3">
+            <a:schemeClr val="accent1"/>
+          </a:fillRef>
+          <a:effectRef idx="2">
+            <a:schemeClr val="accent1"/>
+          </a:effectRef>
+          <a:fontRef idx="minor">
+            <a:schemeClr val="lt1"/>
+          </a:fontRef>
+        </p:style>
+        <p:txBody>
+          <a:bodyPr rtlCol="0" anchor="ctr"/>
+          <a:lstStyle/>
+          <a:p>
+            <a:pPr algn="ctr"/>
+          </a:p>
+        </p:txBody>
+      </p:sp>
+      <p:sp>
+        <p:nvSpPr>
+          <p:cNvPr id="29" name="Rectangle 28"/>
+          <p:cNvSpPr/>
+          <p:nvPr/>
+        </p:nvSpPr>
+        <p:spPr>
+          <a:xfrm>
+            <a:off x="3319272" y="3913632"/>
+            <a:ext cx="2670048" cy="256032"/>
+          </a:xfrm>
+          <a:prstGeom prst="rect">
+            <a:avLst/>
+          </a:prstGeom>
+          <a:solidFill>
+            <a:srgbClr val="1E3A8A"/>
+          </a:solidFill>
+          <a:ln w="10160">
+            <a:solidFill>
+              <a:srgbClr val="1E3A8A"/>
+            </a:solidFill>
+          </a:ln>
+        </p:spPr>
+        <p:style>
+          <a:lnRef idx="1">
+            <a:schemeClr val="accent1"/>
+          </a:lnRef>
+          <a:fillRef idx="3">
+            <a:schemeClr val="accent1"/>
+          </a:fillRef>
+          <a:effectRef idx="2">
+            <a:schemeClr val="accent1"/>
+          </a:effectRef>
+          <a:fontRef idx="minor">
+            <a:schemeClr val="lt1"/>
+          </a:fontRef>
+        </p:style>
+        <p:txBody>
+          <a:bodyPr rtlCol="0" anchor="ctr"/>
+          <a:lstStyle/>
+          <a:p>
+            <a:pPr algn="ctr"/>
+          </a:p>
+        </p:txBody>
+      </p:sp>
+      <p:sp>
+        <p:nvSpPr>
+          <p:cNvPr id="30" name="TextBox 29"/>
+          <p:cNvSpPr txBox="1"/>
+          <p:nvPr/>
+        </p:nvSpPr>
+        <p:spPr>
+          <a:xfrm>
+            <a:off x="3374136" y="3941064"/>
+            <a:ext cx="2560320" cy="201168"/>
+          </a:xfrm>
+          <a:prstGeom prst="rect">
+            <a:avLst/>
+          </a:prstGeom>
+          <a:noFill/>
+        </p:spPr>
+        <p:txBody>
+          <a:bodyPr wrap="none" lIns="0" tIns="0" rIns="0" bIns="0">
+            <a:spAutoFit/>
+          </a:bodyPr>
+          <a:lstStyle/>
+          <a:p>
+            <a:pPr>
+              <a:defRPr sz="850" b="1">
+                <a:solidFill>
+                  <a:srgbClr val="FFFFFF"/>
+                </a:solidFill>
+                <a:latin typeface="Microsoft YaHei"/>
+              </a:defRPr>
+            </a:pPr>
+            <a:r>
+              <a:t>数据资产 · 全工况实测证据对账集</a:t>
+            </a:r>
+          </a:p>
+        </p:txBody>
+      </p:sp>
+      <p:sp>
+        <p:nvSpPr>
+          <p:cNvPr id="31" name="TextBox 30"/>
+          <p:cNvSpPr txBox="1"/>
+          <p:nvPr/>
+        </p:nvSpPr>
+        <p:spPr>
+          <a:xfrm>
+            <a:off x="3392424" y="4215384"/>
+            <a:ext cx="2523744" cy="1737359"/>
+          </a:xfrm>
+          <a:prstGeom prst="rect">
+            <a:avLst/>
+          </a:prstGeom>
+          <a:noFill/>
+        </p:spPr>
+        <p:txBody>
+          <a:bodyPr wrap="square" lIns="0" tIns="0" rIns="0" bIns="0">
+            <a:spAutoFit/>
+          </a:bodyPr>
+          <a:lstStyle/>
+          <a:p>
+            <a:pPr>
+              <a:defRPr sz="780" b="1">
+                <a:solidFill>
+                  <a:srgbClr val="1D4ED8"/>
+                </a:solidFill>
+                <a:latin typeface="Microsoft YaHei"/>
+              </a:defRPr>
+            </a:pPr>
+            <a:r>
+              <a:t>【定位】覆盖双模型、多硬件平台的透明评测数据库</a:t>
+            </a:r>
+          </a:p>
+          <a:p>
+            <a:pPr>
+              <a:spcBef>
+                <a:spcPts val="300"/>
+              </a:spcBef>
+              <a:defRPr sz="740">
+                <a:solidFill>
+                  <a:srgbClr val="0F172A"/>
+                </a:solidFill>
+                <a:latin typeface="Microsoft YaHei"/>
+              </a:defRPr>
+            </a:pPr>
+            <a:r>
+              <a:t>• 核心内容：5 档复用率/长短上下文端到端 TTFT 与分解台账、前后台混压干扰对照表</a:t>
+            </a:r>
+            <a:br/>
+            <a:r>
+              <a:t>• 业务价值：为各业务线提供透明、确定性的加速预估标尺与工程投资回报决策依据</a:t>
+            </a:r>
+          </a:p>
+        </p:txBody>
+      </p:sp>
+      <p:sp>
+        <p:nvSpPr>
+          <p:cNvPr id="32" name="Rectangle 31"/>
+          <p:cNvSpPr/>
+          <p:nvPr/>
+        </p:nvSpPr>
+        <p:spPr>
+          <a:xfrm>
+            <a:off x="6181344" y="3913632"/>
+            <a:ext cx="2670048" cy="2066543"/>
+          </a:xfrm>
+          <a:prstGeom prst="rect">
+            <a:avLst/>
+          </a:prstGeom>
+          <a:solidFill>
+            <a:srgbClr val="FFFFFF"/>
+          </a:solidFill>
+          <a:ln w="12700">
+            <a:solidFill>
+              <a:srgbClr val="CBD5E1"/>
+            </a:solidFill>
+          </a:ln>
+        </p:spPr>
+        <p:style>
+          <a:lnRef idx="1">
+            <a:schemeClr val="accent1"/>
+          </a:lnRef>
+          <a:fillRef idx="3">
+            <a:schemeClr val="accent1"/>
+          </a:fillRef>
+          <a:effectRef idx="2">
+            <a:schemeClr val="accent1"/>
+          </a:effectRef>
+          <a:fontRef idx="minor">
+            <a:schemeClr val="lt1"/>
+          </a:fontRef>
+        </p:style>
+        <p:txBody>
+          <a:bodyPr rtlCol="0" anchor="ctr"/>
+          <a:lstStyle/>
+          <a:p>
+            <a:pPr algn="ctr"/>
+          </a:p>
+        </p:txBody>
+      </p:sp>
+      <p:sp>
+        <p:nvSpPr>
+          <p:cNvPr id="33" name="Rectangle 32"/>
+          <p:cNvSpPr/>
+          <p:nvPr/>
+        </p:nvSpPr>
+        <p:spPr>
+          <a:xfrm>
+            <a:off x="6181344" y="3913632"/>
+            <a:ext cx="2670048" cy="256032"/>
+          </a:xfrm>
+          <a:prstGeom prst="rect">
+            <a:avLst/>
+          </a:prstGeom>
+          <a:solidFill>
+            <a:srgbClr val="1E3A8A"/>
+          </a:solidFill>
+          <a:ln w="10160">
+            <a:solidFill>
+              <a:srgbClr val="1E3A8A"/>
+            </a:solidFill>
+          </a:ln>
+        </p:spPr>
+        <p:style>
+          <a:lnRef idx="1">
+            <a:schemeClr val="accent1"/>
+          </a:lnRef>
+          <a:fillRef idx="3">
+            <a:schemeClr val="accent1"/>
+          </a:fillRef>
+          <a:effectRef idx="2">
+            <a:schemeClr val="accent1"/>
+          </a:effectRef>
+          <a:fontRef idx="minor">
+            <a:schemeClr val="lt1"/>
+          </a:fontRef>
+        </p:style>
+        <p:txBody>
+          <a:bodyPr rtlCol="0" anchor="ctr"/>
+          <a:lstStyle/>
+          <a:p>
+            <a:pPr algn="ctr"/>
+          </a:p>
+        </p:txBody>
+      </p:sp>
+      <p:sp>
+        <p:nvSpPr>
+          <p:cNvPr id="34" name="TextBox 33"/>
+          <p:cNvSpPr txBox="1"/>
+          <p:nvPr/>
+        </p:nvSpPr>
+        <p:spPr>
+          <a:xfrm>
+            <a:off x="6236208" y="3941064"/>
+            <a:ext cx="2560320" cy="201168"/>
+          </a:xfrm>
+          <a:prstGeom prst="rect">
+            <a:avLst/>
+          </a:prstGeom>
+          <a:noFill/>
+        </p:spPr>
+        <p:txBody>
+          <a:bodyPr wrap="none" lIns="0" tIns="0" rIns="0" bIns="0">
+            <a:spAutoFit/>
+          </a:bodyPr>
+          <a:lstStyle/>
+          <a:p>
+            <a:pPr>
+              <a:defRPr sz="850" b="1">
+                <a:solidFill>
+                  <a:srgbClr val="FFFFFF"/>
+                </a:solidFill>
+                <a:latin typeface="Microsoft YaHei"/>
+              </a:defRPr>
+            </a:pPr>
+            <a:r>
+              <a:t>规范资产 · 软硬协同硬件能力需求书</a:t>
+            </a:r>
+          </a:p>
+        </p:txBody>
+      </p:sp>
+      <p:sp>
+        <p:nvSpPr>
+          <p:cNvPr id="35" name="TextBox 34"/>
+          <p:cNvSpPr txBox="1"/>
+          <p:nvPr/>
+        </p:nvSpPr>
+        <p:spPr>
+          <a:xfrm>
+            <a:off x="6254496" y="4215384"/>
+            <a:ext cx="2523744" cy="1737359"/>
+          </a:xfrm>
+          <a:prstGeom prst="rect">
+            <a:avLst/>
+          </a:prstGeom>
+          <a:noFill/>
+        </p:spPr>
+        <p:txBody>
+          <a:bodyPr wrap="square" lIns="0" tIns="0" rIns="0" bIns="0">
+            <a:spAutoFit/>
+          </a:bodyPr>
+          <a:lstStyle/>
+          <a:p>
+            <a:pPr>
+              <a:defRPr sz="780" b="1">
+                <a:solidFill>
+                  <a:srgbClr val="1D4ED8"/>
+                </a:solidFill>
+                <a:latin typeface="Microsoft YaHei"/>
+              </a:defRPr>
+            </a:pPr>
+            <a:r>
+              <a:t>【定位】面向下代 AI 芯片的软硬件协同架构输入说明</a:t>
+            </a:r>
+          </a:p>
+          <a:p>
+            <a:pPr>
+              <a:spcBef>
+                <a:spcPts val="300"/>
+              </a:spcBef>
+              <a:defRPr sz="740">
+                <a:solidFill>
+                  <a:srgbClr val="0F172A"/>
+                </a:solidFill>
+                <a:latin typeface="Microsoft YaHei"/>
+              </a:defRPr>
+            </a:pPr>
+            <a:r>
+              <a:t>• 核心内容：定义连续物理块硬件解析、设备间 DMA 通道规范、总线共享通信协议</a:t>
+            </a:r>
+            <a:br/>
+            <a:r>
+              <a:t>• 战略价值：推动国产专用 AI 芯片原生集成大模型 KVC 加速底座，形成软硬闭环</a:t>
+            </a:r>
+          </a:p>
+        </p:txBody>
+      </p:sp>
+      <p:sp>
+        <p:nvSpPr>
+          <p:cNvPr id="36" name="Rectangle 35"/>
+          <p:cNvSpPr/>
+          <p:nvPr/>
+        </p:nvSpPr>
+        <p:spPr>
+          <a:xfrm>
+            <a:off x="9043416" y="3913632"/>
+            <a:ext cx="2670048" cy="2066543"/>
+          </a:xfrm>
+          <a:prstGeom prst="rect">
+            <a:avLst/>
+          </a:prstGeom>
+          <a:solidFill>
+            <a:srgbClr val="FFFFFF"/>
+          </a:solidFill>
+          <a:ln w="12700">
+            <a:solidFill>
+              <a:srgbClr val="CBD5E1"/>
+            </a:solidFill>
+          </a:ln>
+        </p:spPr>
+        <p:style>
+          <a:lnRef idx="1">
+            <a:schemeClr val="accent1"/>
+          </a:lnRef>
+          <a:fillRef idx="3">
+            <a:schemeClr val="accent1"/>
+          </a:fillRef>
+          <a:effectRef idx="2">
+            <a:schemeClr val="accent1"/>
+          </a:effectRef>
+          <a:fontRef idx="minor">
+            <a:schemeClr val="lt1"/>
+          </a:fontRef>
+        </p:style>
+        <p:txBody>
+          <a:bodyPr rtlCol="0" anchor="ctr"/>
+          <a:lstStyle/>
+          <a:p>
+            <a:pPr algn="ctr"/>
+          </a:p>
+        </p:txBody>
+      </p:sp>
+      <p:sp>
+        <p:nvSpPr>
+          <p:cNvPr id="37" name="Rectangle 36"/>
+          <p:cNvSpPr/>
+          <p:nvPr/>
+        </p:nvSpPr>
+        <p:spPr>
+          <a:xfrm>
+            <a:off x="9043416" y="3913632"/>
+            <a:ext cx="2670048" cy="256032"/>
+          </a:xfrm>
+          <a:prstGeom prst="rect">
+            <a:avLst/>
+          </a:prstGeom>
+          <a:solidFill>
+            <a:srgbClr val="1E3A8A"/>
+          </a:solidFill>
+          <a:ln w="10160">
+            <a:solidFill>
+              <a:srgbClr val="1E3A8A"/>
+            </a:solidFill>
+          </a:ln>
+        </p:spPr>
+        <p:style>
+          <a:lnRef idx="1">
+            <a:schemeClr val="accent1"/>
+          </a:lnRef>
+          <a:fillRef idx="3">
+            <a:schemeClr val="accent1"/>
+          </a:fillRef>
+          <a:effectRef idx="2">
+            <a:schemeClr val="accent1"/>
+          </a:effectRef>
+          <a:fontRef idx="minor">
+            <a:schemeClr val="lt1"/>
+          </a:fontRef>
+        </p:style>
+        <p:txBody>
+          <a:bodyPr rtlCol="0" anchor="ctr"/>
+          <a:lstStyle/>
+          <a:p>
+            <a:pPr algn="ctr"/>
+          </a:p>
+        </p:txBody>
+      </p:sp>
+      <p:sp>
+        <p:nvSpPr>
+          <p:cNvPr id="38" name="TextBox 37"/>
+          <p:cNvSpPr txBox="1"/>
+          <p:nvPr/>
+        </p:nvSpPr>
+        <p:spPr>
+          <a:xfrm>
+            <a:off x="9098280" y="3941064"/>
+            <a:ext cx="2560320" cy="201168"/>
+          </a:xfrm>
+          <a:prstGeom prst="rect">
+            <a:avLst/>
+          </a:prstGeom>
+          <a:noFill/>
+        </p:spPr>
+        <p:txBody>
+          <a:bodyPr wrap="none" lIns="0" tIns="0" rIns="0" bIns="0">
+            <a:spAutoFit/>
+          </a:bodyPr>
+          <a:lstStyle/>
+          <a:p>
+            <a:pPr>
+              <a:defRPr sz="850" b="1">
+                <a:solidFill>
+                  <a:srgbClr val="FFFFFF"/>
+                </a:solidFill>
+                <a:latin typeface="Microsoft YaHei"/>
+              </a:defRPr>
+            </a:pPr>
+            <a:r>
+              <a:t>落地资产 · 生产级集群部署运维手册</a:t>
+            </a:r>
+          </a:p>
+        </p:txBody>
+      </p:sp>
+      <p:sp>
+        <p:nvSpPr>
+          <p:cNvPr id="39" name="TextBox 38"/>
+          <p:cNvSpPr txBox="1"/>
+          <p:nvPr/>
+        </p:nvSpPr>
+        <p:spPr>
+          <a:xfrm>
+            <a:off x="9116568" y="4215384"/>
+            <a:ext cx="2523744" cy="1737359"/>
+          </a:xfrm>
+          <a:prstGeom prst="rect">
+            <a:avLst/>
+          </a:prstGeom>
+          <a:noFill/>
+        </p:spPr>
+        <p:txBody>
+          <a:bodyPr wrap="square" lIns="0" tIns="0" rIns="0" bIns="0">
+            <a:spAutoFit/>
+          </a:bodyPr>
+          <a:lstStyle/>
+          <a:p>
+            <a:pPr>
+              <a:defRPr sz="780" b="1">
+                <a:solidFill>
+                  <a:srgbClr val="1D4ED8"/>
+                </a:solidFill>
+                <a:latin typeface="Microsoft YaHei"/>
+              </a:defRPr>
+            </a:pPr>
+            <a:r>
+              <a:t>【定位】推理集群 KVCache 分层部署作战与调优指南</a:t>
+            </a:r>
+          </a:p>
+          <a:p>
+            <a:pPr>
+              <a:spcBef>
+                <a:spcPts val="300"/>
+              </a:spcBef>
+              <a:defRPr sz="740">
+                <a:solidFill>
+                  <a:srgbClr val="0F172A"/>
+                </a:solidFill>
+                <a:latin typeface="Microsoft YaHei"/>
+              </a:defRPr>
+            </a:pPr>
+            <a:r>
+              <a:t>• 核心内容：内存/SSD 配比模型、硬件 QoS 优先级队列配置、长尾抖动应急预案</a:t>
+            </a:r>
+            <a:br/>
+            <a:r>
+              <a:t>• 实施目标：指导一线工程与算法团队快速完成工程上线，保障生产业务稳定达标</a:t>
+            </a:r>
+          </a:p>
+        </p:txBody>
+      </p:sp>
+      <p:sp>
+        <p:nvSpPr>
+          <p:cNvPr id="40" name="Rectangle 39"/>
+          <p:cNvSpPr/>
+          <p:nvPr/>
+        </p:nvSpPr>
+        <p:spPr>
+          <a:xfrm>
+            <a:off x="457200" y="6053328"/>
+            <a:ext cx="11277295" cy="329184"/>
           </a:xfrm>
           <a:prstGeom prst="rect">
             <a:avLst/>
@@ -8791,144 +9678,24 @@
       </p:sp>
       <p:sp>
         <p:nvSpPr>
-          <p:cNvPr id="12" name="TextBox 11"/>
-          <p:cNvSpPr txBox="1"/>
-          <p:nvPr/>
-        </p:nvSpPr>
-        <p:spPr>
-          <a:xfrm>
-            <a:off x="548640" y="4791456"/>
-            <a:ext cx="3429000" cy="237744"/>
-          </a:xfrm>
-          <a:prstGeom prst="rect">
-            <a:avLst/>
-          </a:prstGeom>
-          <a:noFill/>
-        </p:spPr>
-        <p:txBody>
-          <a:bodyPr wrap="none" lIns="0" tIns="0" rIns="0" bIns="0">
-            <a:spAutoFit/>
-          </a:bodyPr>
-          <a:lstStyle/>
-          <a:p>
-            <a:pPr>
-              <a:defRPr sz="950" b="1">
-                <a:solidFill>
-                  <a:srgbClr val="1E3A8A"/>
-                </a:solidFill>
-                <a:latin typeface="Microsoft YaHei"/>
-              </a:defRPr>
-            </a:pPr>
-            <a:r>
-              <a:t>第 1 周：基线与瓶颈</a:t>
-            </a:r>
-          </a:p>
-        </p:txBody>
-      </p:sp>
-      <p:sp>
-        <p:nvSpPr>
-          <p:cNvPr id="13" name="TextBox 12"/>
-          <p:cNvSpPr txBox="1"/>
-          <p:nvPr/>
-        </p:nvSpPr>
-        <p:spPr>
-          <a:xfrm>
-            <a:off x="566928" y="5102352"/>
-            <a:ext cx="3392424" cy="1170432"/>
-          </a:xfrm>
-          <a:prstGeom prst="rect">
-            <a:avLst/>
-          </a:prstGeom>
-          <a:noFill/>
-        </p:spPr>
-        <p:txBody>
-          <a:bodyPr wrap="square" lIns="0" tIns="0" rIns="0" bIns="0">
-            <a:spAutoFit/>
-          </a:bodyPr>
-          <a:lstStyle/>
-          <a:p>
-            <a:pPr>
-              <a:defRPr sz="819" b="1">
-                <a:solidFill>
-                  <a:srgbClr val="1D4ED8"/>
-                </a:solidFill>
-                <a:latin typeface="Microsoft YaHei"/>
-              </a:defRPr>
-            </a:pPr>
-            <a:r>
-              <a:t>【核心目标】统一基准 · 耗时细粒度分解</a:t>
-            </a:r>
-          </a:p>
-          <a:p>
-            <a:pPr>
-              <a:spcBef>
-                <a:spcPts val="300"/>
-              </a:spcBef>
-              <a:defRPr sz="800">
-                <a:solidFill>
-                  <a:srgbClr val="0F172A"/>
-                </a:solidFill>
-                <a:latin typeface="Microsoft YaHei"/>
-              </a:defRPr>
-            </a:pPr>
-            <a:r>
-              <a:t>• 统一实验比较基准，复核检索与通信开销记录</a:t>
-            </a:r>
-          </a:p>
-          <a:p>
-            <a:pPr>
-              <a:spcBef>
-                <a:spcPts val="300"/>
-              </a:spcBef>
-              <a:defRPr sz="800">
-                <a:solidFill>
-                  <a:srgbClr val="0F172A"/>
-                </a:solidFill>
-                <a:latin typeface="Microsoft YaHei"/>
-              </a:defRPr>
-            </a:pPr>
-            <a:r>
-              <a:t>• 量化分解查询、提交、搬运与同步各阶段时延开销</a:t>
-            </a:r>
-          </a:p>
-          <a:p>
-            <a:pPr>
-              <a:spcBef>
-                <a:spcPts val="300"/>
-              </a:spcBef>
-              <a:defRPr sz="800">
-                <a:solidFill>
-                  <a:srgbClr val="0F172A"/>
-                </a:solidFill>
-                <a:latin typeface="Microsoft YaHei"/>
-              </a:defRPr>
-            </a:pPr>
-            <a:r>
-              <a:t>• 建立各链路时间开销微秒级基线台账</a:t>
-            </a:r>
-          </a:p>
-        </p:txBody>
-      </p:sp>
-      <p:sp>
-        <p:nvSpPr>
-          <p:cNvPr id="14" name="Rectangle 13"/>
+          <p:cNvPr id="41" name="Rectangle 40"/>
           <p:cNvSpPr/>
           <p:nvPr/>
         </p:nvSpPr>
         <p:spPr>
           <a:xfrm>
-            <a:off x="4288536" y="4754880"/>
-            <a:ext cx="3611880" cy="1554480"/>
+            <a:off x="457200" y="6053328"/>
+            <a:ext cx="73152" cy="329184"/>
           </a:xfrm>
           <a:prstGeom prst="rect">
             <a:avLst/>
           </a:prstGeom>
           <a:solidFill>
-            <a:srgbClr val="FFFFFF"/>
+            <a:srgbClr val="1D4ED8"/>
           </a:solidFill>
-          <a:ln w="12700">
+          <a:ln>
             <a:solidFill>
-              <a:srgbClr val="CBD5E1"/>
+              <a:srgbClr val="1D4ED8"/>
             </a:solidFill>
           </a:ln>
         </p:spPr>
@@ -8956,59 +9723,14 @@
       </p:sp>
       <p:sp>
         <p:nvSpPr>
-          <p:cNvPr id="15" name="Rectangle 14"/>
-          <p:cNvSpPr/>
-          <p:nvPr/>
-        </p:nvSpPr>
-        <p:spPr>
-          <a:xfrm>
-            <a:off x="4288536" y="4754880"/>
-            <a:ext cx="3611880" cy="292608"/>
-          </a:xfrm>
-          <a:prstGeom prst="rect">
-            <a:avLst/>
-          </a:prstGeom>
-          <a:solidFill>
-            <a:srgbClr val="F1F5F9"/>
-          </a:solidFill>
-          <a:ln w="12700">
-            <a:solidFill>
-              <a:srgbClr val="CBD5E1"/>
-            </a:solidFill>
-          </a:ln>
-        </p:spPr>
-        <p:style>
-          <a:lnRef idx="1">
-            <a:schemeClr val="accent1"/>
-          </a:lnRef>
-          <a:fillRef idx="3">
-            <a:schemeClr val="accent1"/>
-          </a:fillRef>
-          <a:effectRef idx="2">
-            <a:schemeClr val="accent1"/>
-          </a:effectRef>
-          <a:fontRef idx="minor">
-            <a:schemeClr val="lt1"/>
-          </a:fontRef>
-        </p:style>
-        <p:txBody>
-          <a:bodyPr rtlCol="0" anchor="ctr"/>
-          <a:lstStyle/>
-          <a:p>
-            <a:pPr algn="ctr"/>
-          </a:p>
-        </p:txBody>
-      </p:sp>
-      <p:sp>
-        <p:nvSpPr>
-          <p:cNvPr id="16" name="TextBox 15"/>
+          <p:cNvPr id="42" name="TextBox 41"/>
           <p:cNvSpPr txBox="1"/>
           <p:nvPr/>
         </p:nvSpPr>
         <p:spPr>
           <a:xfrm>
-            <a:off x="4379976" y="4791456"/>
-            <a:ext cx="3429000" cy="237744"/>
+            <a:off x="621792" y="6108192"/>
+            <a:ext cx="11018520" cy="219456"/>
           </a:xfrm>
           <a:prstGeom prst="rect">
             <a:avLst/>
@@ -9022,7 +9744,7 @@
           <a:lstStyle/>
           <a:p>
             <a:pPr>
-              <a:defRPr sz="950" b="1">
+              <a:defRPr sz="819" b="1">
                 <a:solidFill>
                   <a:srgbClr val="1E3A8A"/>
                 </a:solidFill>
@@ -9030,195 +9752,21 @@
               </a:defRPr>
             </a:pPr>
             <a:r>
-              <a:t>第 2 周：单项与场景</a:t>
-            </a:r>
-          </a:p>
-        </p:txBody>
-      </p:sp>
-      <p:sp>
-        <p:nvSpPr>
-          <p:cNvPr id="17" name="TextBox 16"/>
+              <a:t>【实施落地准则】坚持数据驱动与真实混压门禁验收；以扎实的原型实测支撑系统规模落地，以深度的物理瓶颈洞察反哺下一代国产芯片软硬协同演进。</a:t>
+            </a:r>
+          </a:p>
+        </p:txBody>
+      </p:sp>
+      <p:sp>
+        <p:nvSpPr>
+          <p:cNvPr id="43" name="TextBox 42"/>
           <p:cNvSpPr txBox="1"/>
           <p:nvPr/>
         </p:nvSpPr>
         <p:spPr>
           <a:xfrm>
-            <a:off x="4398264" y="5102352"/>
-            <a:ext cx="3392424" cy="1170432"/>
-          </a:xfrm>
-          <a:prstGeom prst="rect">
-            <a:avLst/>
-          </a:prstGeom>
-          <a:noFill/>
-        </p:spPr>
-        <p:txBody>
-          <a:bodyPr wrap="square" lIns="0" tIns="0" rIns="0" bIns="0">
-            <a:spAutoFit/>
-          </a:bodyPr>
-          <a:lstStyle/>
-          <a:p>
-            <a:pPr>
-              <a:defRPr sz="819" b="1">
-                <a:solidFill>
-                  <a:srgbClr val="1D4ED8"/>
-                </a:solidFill>
-                <a:latin typeface="Microsoft YaHei"/>
-              </a:defRPr>
-            </a:pPr>
-            <a:r>
-              <a:t>【核心目标】机制切换 · 指标穿透</a:t>
-            </a:r>
-          </a:p>
-          <a:p>
-            <a:pPr>
-              <a:spcBef>
-                <a:spcPts val="300"/>
-              </a:spcBef>
-              <a:defRPr sz="800">
-                <a:solidFill>
-                  <a:srgbClr val="0F172A"/>
-                </a:solidFill>
-                <a:latin typeface="Microsoft YaHei"/>
-              </a:defRPr>
-            </a:pPr>
-            <a:r>
-              <a:t>• 分别切换各单项优化机制，测试代表业务场景</a:t>
-            </a:r>
-          </a:p>
-          <a:p>
-            <a:pPr>
-              <a:spcBef>
-                <a:spcPts val="300"/>
-              </a:spcBef>
-              <a:defRPr sz="800">
-                <a:solidFill>
-                  <a:srgbClr val="0F172A"/>
-                </a:solidFill>
-                <a:latin typeface="Microsoft YaHei"/>
-              </a:defRPr>
-            </a:pPr>
-            <a:r>
-              <a:t>• 建立物理开销变化与请求端到端指标的精确映射</a:t>
-            </a:r>
-          </a:p>
-          <a:p>
-            <a:pPr>
-              <a:spcBef>
-                <a:spcPts val="300"/>
-              </a:spcBef>
-              <a:defRPr sz="800">
-                <a:solidFill>
-                  <a:srgbClr val="0F172A"/>
-                </a:solidFill>
-                <a:latin typeface="Microsoft YaHei"/>
-              </a:defRPr>
-            </a:pPr>
-            <a:r>
-              <a:t>• 验证控制面快路径与数据面连续聚合的加速净收益</a:t>
-            </a:r>
-          </a:p>
-        </p:txBody>
-      </p:sp>
-      <p:sp>
-        <p:nvSpPr>
-          <p:cNvPr id="18" name="Rectangle 17"/>
-          <p:cNvSpPr/>
-          <p:nvPr/>
-        </p:nvSpPr>
-        <p:spPr>
-          <a:xfrm>
-            <a:off x="8119872" y="4754880"/>
-            <a:ext cx="3611880" cy="1554480"/>
-          </a:xfrm>
-          <a:prstGeom prst="rect">
-            <a:avLst/>
-          </a:prstGeom>
-          <a:solidFill>
-            <a:srgbClr val="EFF6FF"/>
-          </a:solidFill>
-          <a:ln w="15240">
-            <a:solidFill>
-              <a:srgbClr val="1D4ED8"/>
-            </a:solidFill>
-          </a:ln>
-        </p:spPr>
-        <p:style>
-          <a:lnRef idx="1">
-            <a:schemeClr val="accent1"/>
-          </a:lnRef>
-          <a:fillRef idx="3">
-            <a:schemeClr val="accent1"/>
-          </a:fillRef>
-          <a:effectRef idx="2">
-            <a:schemeClr val="accent1"/>
-          </a:effectRef>
-          <a:fontRef idx="minor">
-            <a:schemeClr val="lt1"/>
-          </a:fontRef>
-        </p:style>
-        <p:txBody>
-          <a:bodyPr rtlCol="0" anchor="ctr"/>
-          <a:lstStyle/>
-          <a:p>
-            <a:pPr algn="ctr"/>
-          </a:p>
-        </p:txBody>
-      </p:sp>
-      <p:sp>
-        <p:nvSpPr>
-          <p:cNvPr id="19" name="Rectangle 18"/>
-          <p:cNvSpPr/>
-          <p:nvPr/>
-        </p:nvSpPr>
-        <p:spPr>
-          <a:xfrm>
-            <a:off x="8119872" y="4754880"/>
-            <a:ext cx="3611880" cy="292608"/>
-          </a:xfrm>
-          <a:prstGeom prst="rect">
-            <a:avLst/>
-          </a:prstGeom>
-          <a:solidFill>
-            <a:srgbClr val="F1F5F9"/>
-          </a:solidFill>
-          <a:ln w="12700">
-            <a:solidFill>
-              <a:srgbClr val="CBD5E1"/>
-            </a:solidFill>
-          </a:ln>
-        </p:spPr>
-        <p:style>
-          <a:lnRef idx="1">
-            <a:schemeClr val="accent1"/>
-          </a:lnRef>
-          <a:fillRef idx="3">
-            <a:schemeClr val="accent1"/>
-          </a:fillRef>
-          <a:effectRef idx="2">
-            <a:schemeClr val="accent1"/>
-          </a:effectRef>
-          <a:fontRef idx="minor">
-            <a:schemeClr val="lt1"/>
-          </a:fontRef>
-        </p:style>
-        <p:txBody>
-          <a:bodyPr rtlCol="0" anchor="ctr"/>
-          <a:lstStyle/>
-          <a:p>
-            <a:pPr algn="ctr"/>
-          </a:p>
-        </p:txBody>
-      </p:sp>
-      <p:sp>
-        <p:nvSpPr>
-          <p:cNvPr id="20" name="TextBox 19"/>
-          <p:cNvSpPr txBox="1"/>
-          <p:nvPr/>
-        </p:nvSpPr>
-        <p:spPr>
-          <a:xfrm>
-            <a:off x="8211312" y="4791456"/>
-            <a:ext cx="3429000" cy="237744"/>
+            <a:off x="457200" y="6537960"/>
+            <a:ext cx="10287000" cy="182880"/>
           </a:xfrm>
           <a:prstGeom prst="rect">
             <a:avLst/>
@@ -9232,134 +9780,14 @@
           <a:lstStyle/>
           <a:p>
             <a:pPr>
-              <a:defRPr sz="950" b="1">
-                <a:solidFill>
-                  <a:srgbClr val="1E3A8A"/>
+              <a:defRPr sz="900">
+                <a:solidFill>
+                  <a:srgbClr val="475569"/>
                 </a:solidFill>
                 <a:latin typeface="Microsoft YaHei"/>
               </a:defRPr>
             </a:pPr>
             <a:r>
-              <a:t>第 3 周：组合与汇总</a:t>
-            </a:r>
-          </a:p>
-        </p:txBody>
-      </p:sp>
-      <p:sp>
-        <p:nvSpPr>
-          <p:cNvPr id="21" name="TextBox 20"/>
-          <p:cNvSpPr txBox="1"/>
-          <p:nvPr/>
-        </p:nvSpPr>
-        <p:spPr>
-          <a:xfrm>
-            <a:off x="8229600" y="5102352"/>
-            <a:ext cx="3392424" cy="1170432"/>
-          </a:xfrm>
-          <a:prstGeom prst="rect">
-            <a:avLst/>
-          </a:prstGeom>
-          <a:noFill/>
-        </p:spPr>
-        <p:txBody>
-          <a:bodyPr wrap="square" lIns="0" tIns="0" rIns="0" bIns="0">
-            <a:spAutoFit/>
-          </a:bodyPr>
-          <a:lstStyle/>
-          <a:p>
-            <a:pPr>
-              <a:defRPr sz="819" b="1">
-                <a:solidFill>
-                  <a:srgbClr val="1D4ED8"/>
-                </a:solidFill>
-                <a:latin typeface="Microsoft YaHei"/>
-              </a:defRPr>
-            </a:pPr>
-            <a:r>
-              <a:t>【核心目标】全链混压 · 提炼课题</a:t>
-            </a:r>
-          </a:p>
-          <a:p>
-            <a:pPr>
-              <a:spcBef>
-                <a:spcPts val="300"/>
-              </a:spcBef>
-              <a:defRPr sz="800">
-                <a:solidFill>
-                  <a:srgbClr val="0F172A"/>
-                </a:solidFill>
-                <a:latin typeface="Microsoft YaHei"/>
-              </a:defRPr>
-            </a:pPr>
-            <a:r>
-              <a:t>• 复测重点实验结果，补充全机制组合与前后台混压对照</a:t>
-            </a:r>
-          </a:p>
-          <a:p>
-            <a:pPr>
-              <a:spcBef>
-                <a:spcPts val="300"/>
-              </a:spcBef>
-              <a:defRPr sz="800">
-                <a:solidFill>
-                  <a:srgbClr val="0F172A"/>
-                </a:solidFill>
-                <a:latin typeface="Microsoft YaHei"/>
-              </a:defRPr>
-            </a:pPr>
-            <a:r>
-              <a:t>• 系统汇总加速收益、资源开销、物理瓶颈与权衡边界</a:t>
-            </a:r>
-          </a:p>
-          <a:p>
-            <a:pPr>
-              <a:spcBef>
-                <a:spcPts val="300"/>
-              </a:spcBef>
-              <a:defRPr sz="800">
-                <a:solidFill>
-                  <a:srgbClr val="0F172A"/>
-                </a:solidFill>
-                <a:latin typeface="Microsoft YaHei"/>
-              </a:defRPr>
-            </a:pPr>
-            <a:r>
-              <a:t>• 提炼出可落地的软硬件协同共性研究线索与芯片演进课题</a:t>
-            </a:r>
-          </a:p>
-        </p:txBody>
-      </p:sp>
-      <p:sp>
-        <p:nvSpPr>
-          <p:cNvPr id="22" name="TextBox 21"/>
-          <p:cNvSpPr txBox="1"/>
-          <p:nvPr/>
-        </p:nvSpPr>
-        <p:spPr>
-          <a:xfrm>
-            <a:off x="457200" y="6537960"/>
-            <a:ext cx="10287000" cy="182880"/>
-          </a:xfrm>
-          <a:prstGeom prst="rect">
-            <a:avLst/>
-          </a:prstGeom>
-          <a:noFill/>
-        </p:spPr>
-        <p:txBody>
-          <a:bodyPr wrap="none" lIns="0" tIns="0" rIns="0" bIns="0">
-            <a:spAutoFit/>
-          </a:bodyPr>
-          <a:lstStyle/>
-          <a:p>
-            <a:pPr>
-              <a:defRPr sz="900">
-                <a:solidFill>
-                  <a:srgbClr val="475569"/>
-                </a:solidFill>
-                <a:latin typeface="Microsoft YaHei"/>
-              </a:defRPr>
-            </a:pPr>
-            <a:r>
               <a:t>KVC 工作汇报 · 2026-10-15</a:t>
             </a:r>
           </a:p>
@@ -9367,7 +9795,7 @@
       </p:sp>
       <p:sp>
         <p:nvSpPr>
-          <p:cNvPr id="23" name="TextBox 22"/>
+          <p:cNvPr id="44" name="TextBox 43"/>
           <p:cNvSpPr txBox="1"/>
           <p:nvPr/>
         </p:nvSpPr>
